--- a/1_PR/01_ポートフォリオ.pptx
+++ b/1_PR/01_ポートフォリオ.pptx
@@ -125,7 +125,7 @@
           <a:p>
             <a:fld id="{C5387C26-E1C4-450F-855C-7A95B649E450}" type="datetimeFigureOut">
               <a:rPr kumimoji="1" lang="ja-JP" altLang="en-US" smtClean="0"/>
-              <a:t>2026/4/30</a:t>
+              <a:t>2026/7/6</a:t>
             </a:fld>
             <a:endParaRPr kumimoji="1" lang="ja-JP" altLang="en-US"/>
           </a:p>
@@ -787,7 +787,7 @@
           <a:p>
             <a:fld id="{1D8BD707-D9CF-40AE-B4C6-C98DA3205C09}" type="datetimeFigureOut">
               <a:rPr lang="en-US"/>
-              <a:t>4/30/2026</a:t>
+              <a:t>7/6/2026</a:t>
             </a:fld>
             <a:endParaRPr lang="en-US"/>
           </a:p>
@@ -964,7 +964,7 @@
           <a:p>
             <a:fld id="{1D8BD707-D9CF-40AE-B4C6-C98DA3205C09}" type="datetimeFigureOut">
               <a:rPr lang="en-US"/>
-              <a:t>4/30/2026</a:t>
+              <a:t>7/6/2026</a:t>
             </a:fld>
             <a:endParaRPr lang="en-US"/>
           </a:p>
@@ -1178,7 +1178,7 @@
           <a:p>
             <a:fld id="{1D8BD707-D9CF-40AE-B4C6-C98DA3205C09}" type="datetimeFigureOut">
               <a:rPr lang="en-US"/>
-              <a:t>4/30/2026</a:t>
+              <a:t>7/6/2026</a:t>
             </a:fld>
             <a:endParaRPr lang="en-US"/>
           </a:p>
@@ -1326,7 +1326,7 @@
           <a:p>
             <a:fld id="{1D8BD707-D9CF-40AE-B4C6-C98DA3205C09}" type="datetimeFigureOut">
               <a:rPr lang="en-US"/>
-              <a:t>4/30/2026</a:t>
+              <a:t>7/6/2026</a:t>
             </a:fld>
             <a:endParaRPr lang="en-US"/>
           </a:p>
@@ -1445,7 +1445,7 @@
           <a:p>
             <a:fld id="{1D8BD707-D9CF-40AE-B4C6-C98DA3205C09}" type="datetimeFigureOut">
               <a:rPr lang="en-US"/>
-              <a:t>4/30/2026</a:t>
+              <a:t>7/6/2026</a:t>
             </a:fld>
             <a:endParaRPr lang="en-US"/>
           </a:p>
@@ -1692,7 +1692,7 @@
           <a:p>
             <a:fld id="{1D8BD707-D9CF-40AE-B4C6-C98DA3205C09}" type="datetimeFigureOut">
               <a:rPr lang="en-US"/>
-              <a:t>4/30/2026</a:t>
+              <a:t>7/6/2026</a:t>
             </a:fld>
             <a:endParaRPr lang="en-US"/>
           </a:p>
@@ -3395,23 +3395,22 @@
                   <a:schemeClr val="bg1"/>
                 </a:solidFill>
               </a:rPr>
-              <a:t>・ 将来的にはサーバーなどの知識も習得し、開発全体を理解する</a:t>
-            </a:r>
-            <a:endParaRPr lang="en-US" altLang="ja-JP" sz="2400" dirty="0">
-              <a:solidFill>
-                <a:schemeClr val="bg1"/>
-              </a:solidFill>
-            </a:endParaRPr>
-          </a:p>
-          <a:p>
-            <a:pPr algn="l"/>
+              <a:t>・ 将来的にはレンダリング技術を深く理解することで、</a:t>
+            </a:r>
+            <a:br>
+              <a:rPr lang="en-US" altLang="ja-JP" sz="2400" dirty="0">
+                <a:solidFill>
+                  <a:schemeClr val="bg1"/>
+                </a:solidFill>
+              </a:rPr>
+            </a:br>
             <a:r>
               <a:rPr lang="ja-JP" altLang="en-US" sz="2400" dirty="0">
                 <a:solidFill>
                   <a:schemeClr val="bg1"/>
                 </a:solidFill>
               </a:rPr>
-              <a:t>　 ことで、</a:t>
+              <a:t>　 </a:t>
             </a:r>
             <a:r>
               <a:rPr lang="ja-JP" altLang="en-US" sz="2400" u="sng" dirty="0">
@@ -3419,7 +3418,7 @@
                   <a:srgbClr val="FF0000"/>
                 </a:solidFill>
               </a:rPr>
-              <a:t>提案ができるエンジニア</a:t>
+              <a:t>表現の幅が広いエンジニア</a:t>
             </a:r>
             <a:r>
               <a:rPr lang="ja-JP" altLang="en-US" sz="2400" dirty="0">
